--- a/week-07/presentations/ppts/day-04-lean-value-stream-mapping.pptx
+++ b/week-07/presentations/ppts/day-04-lean-value-stream-mapping.pptx
@@ -1447,7 +1447,7 @@
             </a:pPr>
             <a:r>
               <a:rPr/>
-              <a:t>By 16:00, every triad has DP §4.</a:t>
+              <a:t>By 16:00, every triad has DP Section 4.</a:t>
             </a:r>
           </a:p>
         </p:txBody>
@@ -6417,7 +6417,7 @@
             </a:pPr>
             <a:r>
               <a:rPr/>
-              <a:t>🧿 AI Critique Prompt</a:t>
+              <a:t>🤖 AI Critique Prompt</a:t>
             </a:r>
           </a:p>
         </p:txBody>
@@ -6603,7 +6603,7 @@
             </a:pPr>
             <a:r>
               <a:rPr/>
-              <a:t>5 min: document in §4</a:t>
+              <a:t>5 min: document in Section 4</a:t>
             </a:r>
           </a:p>
           <a:p>
@@ -6729,7 +6729,7 @@
             </a:pPr>
             <a:r>
               <a:rPr/>
-              <a:t>DP §4 drafted</a:t>
+              <a:t>DP Section 4 drafted</a:t>
             </a:r>
           </a:p>
           <a:p>
@@ -6774,7 +6774,7 @@
             </a:pPr>
             <a:r>
               <a:rPr/>
-              <a:t>Bring to Day 5: DP §§1–4 + your top 3 queues. Tomorrow we design the experiments.</a:t>
+              <a:t>Bring to Day 5: DP Sections 1–4 + your top 3 queues. Tomorrow we design the experiments.</a:t>
             </a:r>
           </a:p>
         </p:txBody>
@@ -7074,7 +7074,7 @@
             </a:pPr>
             <a:r>
               <a:rPr/>
-              <a:t>Pin DP §§1–3</a:t>
+              <a:t>Pin DP Sections 1–3</a:t>
             </a:r>
           </a:p>
           <a:p>

--- a/week-07/presentations/ppts/day-04-lean-value-stream-mapping.pptx
+++ b/week-07/presentations/ppts/day-04-lean-value-stream-mapping.pptx
@@ -6495,6 +6495,15 @@
               <a:t>TPM Academy</a:t>
             </a:r>
           </a:p>
+          <a:p>
+            <a:pPr lvl="0" indent="0" marL="0">
+              <a:buNone/>
+            </a:pPr>
+            <a:r>
+              <a:rPr/>
+              <a:t>Week 7 builds Agile delivery and Azure DevOps (ADO) mastery.</a:t>
+            </a:r>
+          </a:p>
         </p:txBody>
       </p:sp>
     </p:spTree>
@@ -6729,7 +6738,7 @@
             </a:pPr>
             <a:r>
               <a:rPr/>
-              <a:t>DP Section 4 drafted</a:t>
+              <a:t>Delivery Plan (DP) Section 4 drafted</a:t>
             </a:r>
           </a:p>
           <a:p>

--- a/week-07/presentations/ppts/day-04-lean-value-stream-mapping.pptx
+++ b/week-07/presentations/ppts/day-04-lean-value-stream-mapping.pptx
@@ -6375,6 +6375,43 @@
           </a:p>
         </p:txBody>
       </p:sp>
+      <p:sp>
+        <p:nvSpPr>
+          <p:cNvPr id="3" name="Content Placeholder 2"/>
+          <p:cNvSpPr>
+            <a:spLocks noGrp="1"/>
+          </p:cNvSpPr>
+          <p:nvPr>
+            <p:ph idx="1"/>
+          </p:nvPr>
+        </p:nvSpPr>
+        <p:spPr/>
+        <p:txBody>
+          <a:bodyPr/>
+          <a:lstStyle/>
+          <a:p>
+            <a:pPr lvl="0" indent="0">
+              <a:buNone/>
+            </a:pPr>
+            <a:r>
+              <a:rPr>
+                <a:latin typeface="Courier"/>
+              </a:rPr>
+              <a:t>[Step 1]──→[Step 2]──→[Step 3]──→...
+│           │           │
+PT: __      PT: __      PT: __
+LT: __      LT: __      LT: __
+QUEUE       QUEUE       QUEUE
+__ items    __ items    __ items
+__ days     __ days     __ days
+═════════════════════════════════════
+Total cycle time: __ days
+Total process time: __ days
+Total flow efficiency: __%</a:t>
+            </a:r>
+          </a:p>
+        </p:txBody>
+      </p:sp>
     </p:spTree>
   </p:cSld>
 </p:sld>
@@ -6422,6 +6459,44 @@
           </a:p>
         </p:txBody>
       </p:sp>
+      <p:sp>
+        <p:nvSpPr>
+          <p:cNvPr id="3" name="Content Placeholder 2"/>
+          <p:cNvSpPr>
+            <a:spLocks noGrp="1"/>
+          </p:cNvSpPr>
+          <p:nvPr>
+            <p:ph idx="1"/>
+          </p:nvPr>
+        </p:nvSpPr>
+        <p:spPr/>
+        <p:txBody>
+          <a:bodyPr/>
+          <a:lstStyle/>
+          <a:p>
+            <a:pPr lvl="0" indent="0">
+              <a:buNone/>
+            </a:pPr>
+            <a:r>
+              <a:rPr>
+                <a:latin typeface="Courier"/>
+              </a:rPr>
+              <a:t>Role: Lean coach reviewing a software value stream.
+Context: &lt;description of the VSM with PT/LT/flow eff numbers
+and identified queues&gt;
+Task: Identify 3 queues likely missing or under-counted:
+1. A queue between two steps not yet shown
+2. A step where PT and LT seem out of line with team reality
+3. An invisible queue (e.g., approvals, "ping someone")
+Constraints:
+- Use only the data given
+- Be specific
+Format: 3 numbered findings — what's missing / why suspect /
+how to verify.</a:t>
+            </a:r>
+          </a:p>
+        </p:txBody>
+      </p:sp>
     </p:spTree>
   </p:cSld>
 </p:sld>
@@ -7665,6 +7740,20 @@
         <p:txBody>
           <a:bodyPr/>
           <a:lstStyle/>
+          <a:p>
+            <a:pPr lvl="0" indent="0">
+              <a:buNone/>
+            </a:pPr>
+            <a:r>
+              <a:rPr>
+                <a:latin typeface="Courier"/>
+              </a:rPr>
+              <a:t>Idea → Discovery → Spec → Build → Ship → Measure → Iterate
+│       │         │       │       │        │         │
+▼       ▼         ▼       ▼       ▼        ▼         ▼
+Q1      Q2        Q3      Q4      Q5       Q6        Q7</a:t>
+            </a:r>
+          </a:p>
           <a:p>
             <a:pPr lvl="0" indent="0" marL="0">
               <a:buNone/>

--- a/week-07/presentations/ppts/day-04-lean-value-stream-mapping.pptx
+++ b/week-07/presentations/ppts/day-04-lean-value-stream-mapping.pptx
@@ -627,7 +627,7 @@
             </a:pPr>
             <a:r>
               <a:rPr/>
-              <a:t>If a triad refuses to estimate, push: “honest guess beats no number.” Calibrate over time.</a:t>
+              <a:t>If a quad refuses to estimate, push: “honest guess beats no number.” Calibrate over time.</a:t>
             </a:r>
           </a:p>
         </p:txBody>
@@ -1447,7 +1447,7 @@
             </a:pPr>
             <a:r>
               <a:rPr/>
-              <a:t>By 16:00, every triad has DP Section 4.</a:t>
+              <a:t>By 16:00, every quad has DP Section 4.</a:t>
             </a:r>
           </a:p>
         </p:txBody>
@@ -5756,7 +5756,7 @@
             </a:pPr>
             <a:r>
               <a:rPr b="1"/>
-              <a:t>Triads • 40 minutes</a:t>
+              <a:t>Quads • 40 minutes</a:t>
             </a:r>
           </a:p>
           <a:p>
@@ -6203,7 +6203,7 @@
             </a:pPr>
             <a:r>
               <a:rPr b="1"/>
-              <a:t>Triads • 40 minutes</a:t>
+              <a:t>Quads • 40 minutes</a:t>
             </a:r>
           </a:p>
           <a:p>
@@ -6651,7 +6651,7 @@
             </a:pPr>
             <a:r>
               <a:rPr b="1"/>
-              <a:t>Triads • 45 minutes • Wrap</a:t>
+              <a:t>Quads • 45 minutes • Wrap</a:t>
             </a:r>
           </a:p>
           <a:p>
@@ -7862,7 +7862,7 @@
             </a:pPr>
             <a:r>
               <a:rPr b="1"/>
-              <a:t>Triads • 35 minutes</a:t>
+              <a:t>Quads • 35 minutes</a:t>
             </a:r>
           </a:p>
           <a:p>

--- a/week-07/presentations/ppts/day-04-lean-value-stream-mapping.pptx
+++ b/week-07/presentations/ppts/day-04-lean-value-stream-mapping.pptx
@@ -5756,7 +5756,7 @@
             </a:pPr>
             <a:r>
               <a:rPr b="1"/>
-              <a:t>Quads • 40 minutes</a:t>
+              <a:t>Quads • 50 minutes</a:t>
             </a:r>
           </a:p>
           <a:p>
@@ -5774,7 +5774,7 @@
             </a:pPr>
             <a:r>
               <a:rPr/>
-              <a:t>⏱ 40 min straight</a:t>
+              <a:t>⏱ 50 min straight</a:t>
             </a:r>
           </a:p>
         </p:txBody>
@@ -6203,7 +6203,7 @@
             </a:pPr>
             <a:r>
               <a:rPr b="1"/>
-              <a:t>Quads • 40 minutes</a:t>
+              <a:t>Quads • 50 minutes</a:t>
             </a:r>
           </a:p>
           <a:p>
@@ -6651,7 +6651,7 @@
             </a:pPr>
             <a:r>
               <a:rPr b="1"/>
-              <a:t>Quads • 45 minutes • Wrap</a:t>
+              <a:t>Quads • 55 minutes • Wrap</a:t>
             </a:r>
           </a:p>
           <a:p>
@@ -7862,7 +7862,7 @@
             </a:pPr>
             <a:r>
               <a:rPr b="1"/>
-              <a:t>Quads • 35 minutes</a:t>
+              <a:t>Quads • 45 minutes</a:t>
             </a:r>
           </a:p>
           <a:p>

--- a/week-07/presentations/ppts/day-04-lean-value-stream-mapping.pptx
+++ b/week-07/presentations/ppts/day-04-lean-value-stream-mapping.pptx
@@ -5765,7 +5765,7 @@
             </a:pPr>
             <a:r>
               <a:rPr/>
-              <a:t>40 min: PT + LT + flow eff per step</a:t>
+              <a:t>50 min: PT + LT + flow eff per step</a:t>
             </a:r>
           </a:p>
           <a:p>
@@ -6230,7 +6230,7 @@
             </a:pPr>
             <a:r>
               <a:rPr/>
-              <a:t>15 min: investigate each (cause / intervention / cost)</a:t>
+              <a:t>25 min: investigate each (cause / intervention / cost)</a:t>
             </a:r>
           </a:p>
           <a:p>
@@ -6248,7 +6248,7 @@
             </a:pPr>
             <a:r>
               <a:rPr/>
-              <a:t>⏱ 5 + 10 + 15 + 10</a:t>
+              <a:t>⏱ 5 + 10 + 25 + 10</a:t>
             </a:r>
           </a:p>
         </p:txBody>
@@ -6660,7 +6660,7 @@
             </a:pPr>
             <a:r>
               <a:rPr/>
-              <a:t>20 min: draw the VSM</a:t>
+              <a:t>30 min: draw the VSM</a:t>
             </a:r>
           </a:p>
           <a:p>
@@ -6696,7 +6696,7 @@
             </a:pPr>
             <a:r>
               <a:rPr/>
-              <a:t>⏱ 20 + 10 + 10 + 5 · 15-min wrap</a:t>
+              <a:t>⏱ 30 + 10 + 10 + 5 · 15-min wrap</a:t>
             </a:r>
           </a:p>
         </p:txBody>
@@ -7871,7 +7871,7 @@
             </a:pPr>
             <a:r>
               <a:rPr/>
-              <a:t>15 min: walk steps idea → value-realized</a:t>
+              <a:t>25 min: walk steps idea → value-realized</a:t>
             </a:r>
           </a:p>
           <a:p>
@@ -7898,7 +7898,7 @@
             </a:pPr>
             <a:r>
               <a:rPr/>
-              <a:t>⏱ 15 + 10 + 10</a:t>
+              <a:t>⏱ 25 + 10 + 10</a:t>
             </a:r>
           </a:p>
         </p:txBody>
